--- a/commercial_auto_risk_scoring.pptx
+++ b/commercial_auto_risk_scoring.pptx
@@ -126,6 +126,7 @@
   <p1510:revLst>
     <p1510:client id="{00000000-0000-0000-0000-000000000000}" v="1256" dt="2026-10-05T12:41:06.606"/>
     <p1510:client id="{105A6FC3-F461-625C-AD63-2ADEE0A6DDEF}" v="642" dt="2026-10-05T11:13:42.466"/>
+    <p1510:client id="{8D8429B7-C9B1-65A3-16CA-A969A5404F64}" v="30" dt="2026-10-05T14:21:42.170"/>
   </p1510:revLst>
 </p1510:revInfo>
 </file>
@@ -4967,20 +4968,12 @@
           </a:p>
           <a:p>
             <a:r>
-              <a:rPr lang="en-US" dirty="0" err="1">
+              <a:rPr lang="en-US" dirty="0">
                 <a:latin typeface="Aptos"/>
                 <a:ea typeface="+mn-lt"/>
                 <a:cs typeface="+mn-lt"/>
               </a:rPr>
-              <a:t>train_test_split</a:t>
-            </a:r>
-            <a:r>
-              <a:rPr lang="en-US" dirty="0">
-                <a:latin typeface="Aptos"/>
-                <a:ea typeface="+mn-lt"/>
-                <a:cs typeface="+mn-lt"/>
-              </a:rPr>
-              <a:t> data</a:t>
+              <a:t>train_test_split data</a:t>
             </a:r>
           </a:p>
           <a:p>
@@ -5004,15 +4997,7 @@
                 <a:ea typeface="+mn-lt"/>
                 <a:cs typeface="+mn-lt"/>
               </a:rPr>
-              <a:t>after </a:t>
-            </a:r>
-            <a:r>
-              <a:rPr lang="en-US" dirty="0" err="1">
-                <a:latin typeface="Aptos"/>
-                <a:ea typeface="+mn-lt"/>
-                <a:cs typeface="+mn-lt"/>
-              </a:rPr>
-              <a:t>train_test_split</a:t>
+              <a:t>after train_test_split</a:t>
             </a:r>
             <a:endParaRPr lang="en-US">
               <a:latin typeface="Aptos"/>
@@ -5069,15 +5054,7 @@
                 <a:ea typeface="+mn-lt"/>
                 <a:cs typeface="+mn-lt"/>
               </a:rPr>
-              <a:t>Selected: </a:t>
-            </a:r>
-            <a:r>
-              <a:rPr lang="en-US" dirty="0" err="1">
-                <a:latin typeface="Aptos"/>
-                <a:ea typeface="+mn-lt"/>
-                <a:cs typeface="+mn-lt"/>
-              </a:rPr>
-              <a:t>XGBoost</a:t>
+              <a:t>Selected: XGBoost</a:t>
             </a:r>
           </a:p>
           <a:p>
@@ -5103,6 +5080,10 @@
               </a:rPr>
               <a:t>Accuracy may not be suitable in this case</a:t>
             </a:r>
+            <a:endParaRPr lang="en-US" dirty="0">
+              <a:ea typeface="+mn-lt"/>
+              <a:cs typeface="+mn-lt"/>
+            </a:endParaRPr>
           </a:p>
           <a:p>
             <a:pPr lvl="1">
@@ -5212,17 +5193,13 @@
         <p:spPr/>
         <p:txBody>
           <a:bodyPr vert="horz" lIns="91440" tIns="45720" rIns="91440" bIns="45720" rtlCol="0" anchor="t">
-            <a:normAutofit/>
+            <a:normAutofit lnSpcReduction="10000"/>
           </a:bodyPr>
           <a:lstStyle/>
           <a:p>
             <a:r>
               <a:rPr lang="en-US" dirty="0"/>
-              <a:t>Model: </a:t>
-            </a:r>
-            <a:r>
-              <a:rPr lang="en-US" dirty="0" err="1"/>
-              <a:t>XGBoost</a:t>
+              <a:t>Model: XGBoost</a:t>
             </a:r>
           </a:p>
           <a:p>
@@ -5235,8 +5212,35 @@
                 <a:ea typeface="+mn-lt"/>
                 <a:cs typeface="+mn-lt"/>
               </a:rPr>
-              <a:t>Captures non-linear operational interactions without manual feature combinations</a:t>
-            </a:r>
+              <a:t>Captures non-linear operational</a:t>
+            </a:r>
+            <a:br>
+              <a:rPr lang="en-US" dirty="0">
+                <a:ea typeface="+mn-lt"/>
+                <a:cs typeface="+mn-lt"/>
+              </a:rPr>
+            </a:br>
+            <a:r>
+              <a:rPr lang="en-US" dirty="0">
+                <a:ea typeface="+mn-lt"/>
+                <a:cs typeface="+mn-lt"/>
+              </a:rPr>
+              <a:t>interactions without manual feature </a:t>
+            </a:r>
+            <a:br>
+              <a:rPr lang="en-US" dirty="0">
+                <a:ea typeface="+mn-lt"/>
+                <a:cs typeface="+mn-lt"/>
+              </a:rPr>
+            </a:br>
+            <a:r>
+              <a:rPr lang="en-US" dirty="0">
+                <a:ea typeface="+mn-lt"/>
+                <a:cs typeface="+mn-lt"/>
+              </a:rPr>
+              <a:t>combinations</a:t>
+            </a:r>
+            <a:endParaRPr lang="en-US" dirty="0"/>
           </a:p>
           <a:p>
             <a:pPr lvl="1">
@@ -5248,7 +5252,20 @@
                 <a:ea typeface="+mn-lt"/>
                 <a:cs typeface="+mn-lt"/>
               </a:rPr>
-              <a:t>should be more resilient to skewness and outliers</a:t>
+              <a:t>should be more resilient to skewness </a:t>
+            </a:r>
+            <a:br>
+              <a:rPr lang="en-US" dirty="0">
+                <a:ea typeface="+mn-lt"/>
+                <a:cs typeface="+mn-lt"/>
+              </a:rPr>
+            </a:br>
+            <a:r>
+              <a:rPr lang="en-US" dirty="0">
+                <a:ea typeface="+mn-lt"/>
+                <a:cs typeface="+mn-lt"/>
+              </a:rPr>
+              <a:t>and outliers</a:t>
             </a:r>
             <a:endParaRPr lang="en-US" dirty="0"/>
           </a:p>
@@ -5262,7 +5279,20 @@
                 <a:ea typeface="+mn-lt"/>
                 <a:cs typeface="+mn-lt"/>
               </a:rPr>
-              <a:t>Native handling of sparse features and missing values.</a:t>
+              <a:t>Native handling of sparse features and </a:t>
+            </a:r>
+            <a:br>
+              <a:rPr lang="en-US" dirty="0">
+                <a:ea typeface="+mn-lt"/>
+                <a:cs typeface="+mn-lt"/>
+              </a:rPr>
+            </a:br>
+            <a:r>
+              <a:rPr lang="en-US" dirty="0">
+                <a:ea typeface="+mn-lt"/>
+                <a:cs typeface="+mn-lt"/>
+              </a:rPr>
+              <a:t>missing values.</a:t>
             </a:r>
           </a:p>
           <a:p>
@@ -5310,6 +5340,66 @@
           </a:p>
         </p:txBody>
       </p:sp>
+      <p:pic>
+        <p:nvPicPr>
+          <p:cNvPr id="4" name="Picture 3">
+            <a:extLst>
+              <a:ext uri="{FF2B5EF4-FFF2-40B4-BE49-F238E27FC236}">
+                <a16:creationId xmlns:a16="http://schemas.microsoft.com/office/drawing/2014/main" id="{8F5D9F1B-5892-5C99-FF07-E8E84B58DF2B}"/>
+              </a:ext>
+            </a:extLst>
+          </p:cNvPr>
+          <p:cNvPicPr>
+            <a:picLocks noChangeAspect="1"/>
+          </p:cNvPicPr>
+          <p:nvPr/>
+        </p:nvPicPr>
+        <p:blipFill>
+          <a:blip r:embed="rId2"/>
+          <a:stretch>
+            <a:fillRect/>
+          </a:stretch>
+        </p:blipFill>
+        <p:spPr>
+          <a:xfrm>
+            <a:off x="8789304" y="4684071"/>
+            <a:ext cx="2571146" cy="1493611"/>
+          </a:xfrm>
+          <a:prstGeom prst="rect">
+            <a:avLst/>
+          </a:prstGeom>
+        </p:spPr>
+      </p:pic>
+      <p:pic>
+        <p:nvPicPr>
+          <p:cNvPr id="6" name="Picture 5">
+            <a:extLst>
+              <a:ext uri="{FF2B5EF4-FFF2-40B4-BE49-F238E27FC236}">
+                <a16:creationId xmlns:a16="http://schemas.microsoft.com/office/drawing/2014/main" id="{210ED860-293B-C29B-CAEC-888A15EFBECB}"/>
+              </a:ext>
+            </a:extLst>
+          </p:cNvPr>
+          <p:cNvPicPr>
+            <a:picLocks noChangeAspect="1"/>
+          </p:cNvPicPr>
+          <p:nvPr/>
+        </p:nvPicPr>
+        <p:blipFill>
+          <a:blip r:embed="rId3"/>
+          <a:stretch>
+            <a:fillRect/>
+          </a:stretch>
+        </p:blipFill>
+        <p:spPr>
+          <a:xfrm>
+            <a:off x="6938241" y="1935160"/>
+            <a:ext cx="4435022" cy="2273149"/>
+          </a:xfrm>
+          <a:prstGeom prst="rect">
+            <a:avLst/>
+          </a:prstGeom>
+        </p:spPr>
+      </p:pic>
     </p:spTree>
     <p:extLst>
       <p:ext uri="{BB962C8B-B14F-4D97-AF65-F5344CB8AC3E}">
